--- a/Report/4주차.pptx
+++ b/Report/4주차.pptx
@@ -3683,6 +3683,49 @@
                 <a:latin typeface="+mn-ea"/>
               </a:rPr>
               <a:t>: 117.68ms</a:t>
+            </a:r>
+          </a:p>
+        </p:txBody>
+      </p:sp>
+      <p:sp>
+        <p:nvSpPr>
+          <p:cNvPr id="3" name="TextBox 2">
+            <a:extLst>
+              <a:ext uri="{FF2B5EF4-FFF2-40B4-BE49-F238E27FC236}">
+                <a16:creationId xmlns:a16="http://schemas.microsoft.com/office/drawing/2014/main" id="{AE33A203-53C6-565C-415D-3E2A100F8B07}"/>
+              </a:ext>
+            </a:extLst>
+          </p:cNvPr>
+          <p:cNvSpPr txBox="1"/>
+          <p:nvPr/>
+        </p:nvSpPr>
+        <p:spPr>
+          <a:xfrm>
+            <a:off x="2895600" y="5257800"/>
+            <a:ext cx="3954929" cy="369332"/>
+          </a:xfrm>
+          <a:prstGeom prst="rect">
+            <a:avLst/>
+          </a:prstGeom>
+          <a:noFill/>
+        </p:spPr>
+        <p:txBody>
+          <a:bodyPr wrap="none" rtlCol="0">
+            <a:spAutoFit/>
+          </a:bodyPr>
+          <a:lstStyle/>
+          <a:p>
+            <a:r>
+              <a:rPr lang="ko-KR" altLang="en-US" dirty="0"/>
+              <a:t>휴리스틱에 일반 </a:t>
+            </a:r>
+            <a:r>
+              <a:rPr lang="en-US" altLang="ko-KR" dirty="0"/>
+              <a:t>a* </a:t>
+            </a:r>
+            <a:r>
+              <a:rPr lang="ko-KR" altLang="en-US" dirty="0"/>
+              <a:t>포함 메모리 측정</a:t>
             </a:r>
           </a:p>
         </p:txBody>

--- a/Report/4주차.pptx
+++ b/Report/4주차.pptx
@@ -123,7 +123,7 @@
           <a:p>
             <a:fld id="{12912881-8C8D-44A6-AE66-9F7D64B0003F}" type="datetimeFigureOut">
               <a:rPr lang="ko-KR" altLang="en-US" smtClean="0"/>
-              <a:t>2026-07-16</a:t>
+              <a:t>2026-07-20</a:t>
             </a:fld>
             <a:endParaRPr lang="ko-KR" altLang="en-US"/>
           </a:p>
@@ -983,7 +983,7 @@
           <a:p>
             <a:fld id="{1D8BD707-D9CF-40AE-B4C6-C98DA3205C09}" type="datetimeFigureOut">
               <a:rPr lang="en-US"/>
-              <a:t>7/16/2026</a:t>
+              <a:t>7/20/2026</a:t>
             </a:fld>
             <a:endParaRPr lang="en-US"/>
           </a:p>
@@ -1158,7 +1158,7 @@
           <a:p>
             <a:fld id="{1D8BD707-D9CF-40AE-B4C6-C98DA3205C09}" type="datetimeFigureOut">
               <a:rPr lang="en-US"/>
-              <a:t>7/16/2026</a:t>
+              <a:t>7/20/2026</a:t>
             </a:fld>
             <a:endParaRPr lang="en-US"/>
           </a:p>
@@ -1372,7 +1372,7 @@
           <a:p>
             <a:fld id="{1D8BD707-D9CF-40AE-B4C6-C98DA3205C09}" type="datetimeFigureOut">
               <a:rPr lang="en-US"/>
-              <a:t>7/16/2026</a:t>
+              <a:t>7/20/2026</a:t>
             </a:fld>
             <a:endParaRPr lang="en-US"/>
           </a:p>
@@ -1520,7 +1520,7 @@
           <a:p>
             <a:fld id="{1D8BD707-D9CF-40AE-B4C6-C98DA3205C09}" type="datetimeFigureOut">
               <a:rPr lang="en-US"/>
-              <a:t>7/16/2026</a:t>
+              <a:t>7/20/2026</a:t>
             </a:fld>
             <a:endParaRPr lang="en-US"/>
           </a:p>
@@ -1639,7 +1639,7 @@
           <a:p>
             <a:fld id="{1D8BD707-D9CF-40AE-B4C6-C98DA3205C09}" type="datetimeFigureOut">
               <a:rPr lang="en-US"/>
-              <a:t>7/16/2026</a:t>
+              <a:t>7/20/2026</a:t>
             </a:fld>
             <a:endParaRPr lang="en-US"/>
           </a:p>
@@ -1862,7 +1862,7 @@
           <a:p>
             <a:fld id="{1D8BD707-D9CF-40AE-B4C6-C98DA3205C09}" type="datetimeFigureOut">
               <a:rPr lang="en-US"/>
-              <a:t>7/16/2026</a:t>
+              <a:t>7/20/2026</a:t>
             </a:fld>
             <a:endParaRPr lang="en-US"/>
           </a:p>
@@ -2940,23 +2940,7 @@
             </a:r>
             <a:r>
               <a:rPr lang="ko-KR" altLang="en-US" spc="-25" dirty="0"/>
-              <a:t>주차</a:t>
-            </a:r>
-            <a:r>
-              <a:rPr lang="en-US" altLang="ko-KR" spc="-25" dirty="0"/>
-              <a:t>(</a:t>
-            </a:r>
-            <a:r>
-              <a:rPr lang="ko-KR" altLang="en-US" spc="-25" dirty="0" err="1"/>
-              <a:t>출차</a:t>
-            </a:r>
-            <a:r>
-              <a:rPr lang="en-US" altLang="ko-KR" spc="-25" dirty="0"/>
-              <a:t>)</a:t>
-            </a:r>
-            <a:r>
-              <a:rPr lang="ko-KR" altLang="en-US" spc="-25" dirty="0"/>
-              <a:t> 구현</a:t>
+              <a:t>자율주행 알고리즘 비교</a:t>
             </a:r>
             <a:endParaRPr spc="-25" dirty="0"/>
           </a:p>
@@ -3010,36 +2994,6 @@
           </a:p>
         </p:txBody>
       </p:sp>
-      <p:pic>
-        <p:nvPicPr>
-          <p:cNvPr id="14" name="그림 13">
-            <a:extLst>
-              <a:ext uri="{FF2B5EF4-FFF2-40B4-BE49-F238E27FC236}">
-                <a16:creationId xmlns:a16="http://schemas.microsoft.com/office/drawing/2014/main" id="{D644494F-B7B6-0ABC-858F-C3DA1F1E9F52}"/>
-              </a:ext>
-            </a:extLst>
-          </p:cNvPr>
-          <p:cNvPicPr>
-            <a:picLocks noChangeAspect="1"/>
-          </p:cNvPicPr>
-          <p:nvPr/>
-        </p:nvPicPr>
-        <p:blipFill>
-          <a:blip r:embed="rId3"/>
-          <a:stretch>
-            <a:fillRect/>
-          </a:stretch>
-        </p:blipFill>
-        <p:spPr>
-          <a:xfrm>
-            <a:off x="6324600" y="3365863"/>
-            <a:ext cx="5279848" cy="2807734"/>
-          </a:xfrm>
-          <a:prstGeom prst="rect">
-            <a:avLst/>
-          </a:prstGeom>
-        </p:spPr>
-      </p:pic>
       <p:sp>
         <p:nvSpPr>
           <p:cNvPr id="5" name="내용 개체 틀 2">
@@ -3057,7 +3011,7 @@
         <p:spPr>
           <a:xfrm>
             <a:off x="1028700" y="1520351"/>
-            <a:ext cx="10134600" cy="1097160"/>
+            <a:ext cx="10134600" cy="5190588"/>
           </a:xfrm>
           <a:prstGeom prst="rect">
             <a:avLst/>
@@ -3144,23 +3098,10 @@
               <a:buChar char="•"/>
             </a:pPr>
             <a:r>
-              <a:rPr lang="en-US" altLang="ko-KR" sz="1600" dirty="0" err="1">
+              <a:rPr lang="ko-KR" altLang="en-US" sz="1600" dirty="0">
                 <a:latin typeface="+mn-ea"/>
               </a:rPr>
-              <a:t>ReedShdfsfd</a:t>
-            </a:r>
-            <a:r>
-              <a:rPr lang="en-US" altLang="ko-KR" sz="1600" dirty="0">
-                <a:latin typeface="+mn-ea"/>
-              </a:rPr>
-              <a:t> </a:t>
-            </a:r>
-            <a:r>
-              <a:rPr lang="ko-KR" altLang="en-US" sz="1600" dirty="0">
-                <a:latin typeface="Malgun Gothic"/>
-                <a:cs typeface="Malgun Gothic"/>
-              </a:rPr>
-              <a:t>알고</a:t>
+              <a:t>차량 추종</a:t>
             </a:r>
             <a:endParaRPr lang="en-US" altLang="ko-KR" sz="1600" dirty="0">
               <a:latin typeface="+mn-ea"/>
@@ -3175,49 +3116,120 @@
               <a:buChar char="•"/>
             </a:pPr>
             <a:r>
-              <a:rPr lang="ko-KR" altLang="en-US" sz="1400" dirty="0">
-                <a:latin typeface="Malgun Gothic"/>
-                <a:cs typeface="Malgun Gothic"/>
-              </a:rPr>
-              <a:t>전진 </a:t>
-            </a:r>
-            <a:r>
-              <a:rPr lang="en-US" altLang="ko-KR" sz="1400" dirty="0">
-                <a:latin typeface="Malgun Gothic"/>
-                <a:cs typeface="Malgun Gothic"/>
-              </a:rPr>
-              <a:t>+ </a:t>
-            </a:r>
-            <a:r>
-              <a:rPr lang="ko-KR" altLang="en-US" sz="1400" b="1" dirty="0">
-                <a:solidFill>
-                  <a:srgbClr val="CF3C1C"/>
-                </a:solidFill>
-                <a:latin typeface="Malgun Gothic"/>
-                <a:cs typeface="Malgun Gothic"/>
-              </a:rPr>
-              <a:t>후진</a:t>
-            </a:r>
-            <a:r>
-              <a:rPr lang="ko-KR" altLang="en-US" sz="1400" dirty="0">
-                <a:latin typeface="Malgun Gothic"/>
-                <a:cs typeface="Malgun Gothic"/>
-              </a:rPr>
-              <a:t>이 가능한 </a:t>
-            </a:r>
-            <a:r>
-              <a:rPr lang="ko-KR" altLang="ko-KR" sz="1400" dirty="0"/>
-              <a:t>목표 위치와 방향까지</a:t>
-            </a:r>
-            <a:r>
-              <a:rPr lang="ko-KR" altLang="en-US" sz="1400" dirty="0">
-                <a:latin typeface="Malgun Gothic"/>
-                <a:cs typeface="Malgun Gothic"/>
-              </a:rPr>
-              <a:t> 차량의 최단경로</a:t>
-            </a:r>
-            <a:endParaRPr lang="en-US" altLang="ko-KR" sz="1600" dirty="0">
-              <a:latin typeface="+mn-ea"/>
+              <a:rPr lang="en-US" altLang="ko-KR" sz="1200" dirty="0">
+                <a:latin typeface="Malgun Gothic"/>
+                <a:cs typeface="Malgun Gothic"/>
+              </a:rPr>
+              <a:t>Gipps</a:t>
+            </a:r>
+            <a:r>
+              <a:rPr lang="ko-KR" altLang="en-US" sz="1200" dirty="0">
+                <a:latin typeface="Malgun Gothic"/>
+                <a:cs typeface="Malgun Gothic"/>
+              </a:rPr>
+              <a:t> </a:t>
+            </a:r>
+            <a:r>
+              <a:rPr lang="en-US" altLang="ko-KR" sz="1200" dirty="0">
+                <a:latin typeface="Malgun Gothic"/>
+                <a:cs typeface="Malgun Gothic"/>
+              </a:rPr>
+              <a:t>: </a:t>
+            </a:r>
+            <a:r>
+              <a:rPr lang="ko-KR" altLang="en-US" sz="1200" dirty="0">
+                <a:latin typeface="Malgun Gothic"/>
+                <a:cs typeface="Malgun Gothic"/>
+              </a:rPr>
+              <a:t>앞차 급제동시 대처가능한 안전거리 유지</a:t>
+            </a:r>
+            <a:endParaRPr lang="en-US" altLang="ko-KR" sz="1200" dirty="0">
+              <a:latin typeface="Malgun Gothic"/>
+              <a:cs typeface="Malgun Gothic"/>
+            </a:endParaRPr>
+          </a:p>
+          <a:p>
+            <a:pPr marL="1200150" lvl="2" indent="-285750">
+              <a:lnSpc>
+                <a:spcPct val="150000"/>
+              </a:lnSpc>
+              <a:buFont typeface="Arial" panose="020B0604020202020204" pitchFamily="34" charset="0"/>
+              <a:buChar char="•"/>
+            </a:pPr>
+            <a:r>
+              <a:rPr lang="ko-KR" altLang="en-US" sz="1100" dirty="0">
+                <a:latin typeface="Malgun Gothic"/>
+                <a:cs typeface="Malgun Gothic"/>
+              </a:rPr>
+              <a:t>장점 </a:t>
+            </a:r>
+            <a:r>
+              <a:rPr lang="en-US" altLang="ko-KR" sz="1100" dirty="0">
+                <a:latin typeface="Malgun Gothic"/>
+                <a:cs typeface="Malgun Gothic"/>
+              </a:rPr>
+              <a:t>: </a:t>
+            </a:r>
+            <a:r>
+              <a:rPr lang="ko-KR" altLang="en-US" sz="1100" dirty="0">
+                <a:latin typeface="Malgun Gothic"/>
+                <a:cs typeface="Malgun Gothic"/>
+              </a:rPr>
+              <a:t>충돌방지 보장</a:t>
+            </a:r>
+            <a:r>
+              <a:rPr lang="en-US" altLang="ko-KR" sz="1100" dirty="0">
+                <a:latin typeface="Malgun Gothic"/>
+                <a:cs typeface="Malgun Gothic"/>
+              </a:rPr>
+              <a:t> </a:t>
+            </a:r>
+          </a:p>
+          <a:p>
+            <a:pPr marL="1200150" lvl="2" indent="-285750">
+              <a:lnSpc>
+                <a:spcPct val="150000"/>
+              </a:lnSpc>
+              <a:buFont typeface="Arial" panose="020B0604020202020204" pitchFamily="34" charset="0"/>
+              <a:buChar char="•"/>
+            </a:pPr>
+            <a:r>
+              <a:rPr lang="ko-KR" altLang="en-US" sz="1100" dirty="0">
+                <a:latin typeface="Malgun Gothic"/>
+                <a:cs typeface="Malgun Gothic"/>
+              </a:rPr>
+              <a:t>단점 </a:t>
+            </a:r>
+            <a:r>
+              <a:rPr lang="en-US" altLang="ko-KR" sz="1100" dirty="0">
+                <a:latin typeface="Malgun Gothic"/>
+                <a:cs typeface="Malgun Gothic"/>
+              </a:rPr>
+              <a:t>: </a:t>
+            </a:r>
+            <a:r>
+              <a:rPr lang="ko-KR" altLang="en-US" sz="1100" dirty="0">
+                <a:latin typeface="Malgun Gothic"/>
+                <a:cs typeface="Malgun Gothic"/>
+              </a:rPr>
+              <a:t>기계적인 움직임</a:t>
+            </a:r>
+            <a:r>
+              <a:rPr lang="en-US" altLang="ko-KR" sz="1100" dirty="0">
+                <a:latin typeface="Malgun Gothic"/>
+                <a:cs typeface="Malgun Gothic"/>
+              </a:rPr>
+              <a:t>, </a:t>
+            </a:r>
+            <a:r>
+              <a:rPr lang="ko-KR" altLang="en-US" sz="1100" dirty="0">
+                <a:latin typeface="Malgun Gothic"/>
+                <a:cs typeface="Malgun Gothic"/>
+              </a:rPr>
+              <a:t>파라미터 유연성이 떨어짐</a:t>
+            </a:r>
+            <a:endParaRPr lang="en-US" altLang="ko-KR" sz="1100" dirty="0">
+              <a:latin typeface="Malgun Gothic"/>
               <a:cs typeface="Malgun Gothic"/>
             </a:endParaRPr>
           </a:p>
@@ -3230,14 +3242,686 @@
               <a:buChar char="•"/>
             </a:pPr>
             <a:r>
-              <a:rPr lang="en-US" altLang="ko-KR" sz="1400" dirty="0" err="1">
+              <a:rPr lang="en-US" altLang="ko-KR" sz="1200" b="1" dirty="0">
+                <a:highlight>
+                  <a:srgbClr val="F8D4CC"/>
+                </a:highlight>
+                <a:latin typeface="Malgun Gothic"/>
+                <a:cs typeface="Malgun Gothic"/>
+              </a:rPr>
+              <a:t>IDM :</a:t>
+            </a:r>
+            <a:r>
+              <a:rPr lang="ko-KR" altLang="en-US" sz="1200" b="1" dirty="0">
+                <a:highlight>
+                  <a:srgbClr val="F8D4CC"/>
+                </a:highlight>
+                <a:latin typeface="Malgun Gothic"/>
+                <a:cs typeface="Malgun Gothic"/>
+              </a:rPr>
+              <a:t> 하나의 수식으로 부드럽게 </a:t>
+            </a:r>
+            <a:r>
+              <a:rPr lang="ko-KR" altLang="en-US" sz="1200" b="1" dirty="0" err="1">
+                <a:highlight>
+                  <a:srgbClr val="F8D4CC"/>
+                </a:highlight>
+                <a:latin typeface="Malgun Gothic"/>
+                <a:cs typeface="Malgun Gothic"/>
+              </a:rPr>
+              <a:t>가감속</a:t>
+            </a:r>
+            <a:r>
+              <a:rPr lang="ko-KR" altLang="en-US" sz="1200" b="1" dirty="0">
+                <a:highlight>
+                  <a:srgbClr val="F8D4CC"/>
+                </a:highlight>
+                <a:latin typeface="Malgun Gothic"/>
+                <a:cs typeface="Malgun Gothic"/>
+              </a:rPr>
+              <a:t> 제어</a:t>
+            </a:r>
+            <a:endParaRPr lang="en-US" altLang="ko-KR" sz="1200" b="1" dirty="0">
+              <a:highlight>
+                <a:srgbClr val="F8D4CC"/>
+              </a:highlight>
+              <a:latin typeface="Malgun Gothic"/>
+              <a:cs typeface="Malgun Gothic"/>
+            </a:endParaRPr>
+          </a:p>
+          <a:p>
+            <a:pPr marL="1200150" lvl="2" indent="-285750">
+              <a:lnSpc>
+                <a:spcPct val="150000"/>
+              </a:lnSpc>
+              <a:buFont typeface="Arial" panose="020B0604020202020204" pitchFamily="34" charset="0"/>
+              <a:buChar char="•"/>
+            </a:pPr>
+            <a:r>
+              <a:rPr lang="ko-KR" altLang="en-US" sz="1100" dirty="0">
+                <a:latin typeface="Malgun Gothic"/>
+                <a:cs typeface="Malgun Gothic"/>
+              </a:rPr>
+              <a:t>장점 </a:t>
+            </a:r>
+            <a:r>
+              <a:rPr lang="en-US" altLang="ko-KR" sz="1100" dirty="0">
+                <a:latin typeface="Malgun Gothic"/>
+                <a:cs typeface="Malgun Gothic"/>
+              </a:rPr>
+              <a:t>: </a:t>
+            </a:r>
+            <a:r>
+              <a:rPr lang="ko-KR" altLang="en-US" sz="1100" dirty="0">
+                <a:latin typeface="Malgun Gothic"/>
+                <a:cs typeface="Malgun Gothic"/>
+              </a:rPr>
+              <a:t>파라미터 유연성</a:t>
+            </a:r>
+            <a:r>
+              <a:rPr lang="en-US" altLang="ko-KR" sz="1100" dirty="0">
+                <a:latin typeface="Malgun Gothic"/>
+                <a:cs typeface="Malgun Gothic"/>
+              </a:rPr>
+              <a:t>, </a:t>
+            </a:r>
+            <a:r>
+              <a:rPr lang="ko-KR" altLang="en-US" sz="1100" dirty="0">
+                <a:latin typeface="Malgun Gothic"/>
+                <a:cs typeface="Malgun Gothic"/>
+              </a:rPr>
+              <a:t>실제 사람과 정합도 높음</a:t>
+            </a:r>
+            <a:r>
+              <a:rPr lang="en-US" altLang="ko-KR" sz="1100" dirty="0">
+                <a:latin typeface="Malgun Gothic"/>
+                <a:cs typeface="Malgun Gothic"/>
+              </a:rPr>
+              <a:t> </a:t>
+            </a:r>
+          </a:p>
+          <a:p>
+            <a:pPr marL="1200150" lvl="2" indent="-285750">
+              <a:lnSpc>
+                <a:spcPct val="150000"/>
+              </a:lnSpc>
+              <a:buFont typeface="Arial" panose="020B0604020202020204" pitchFamily="34" charset="0"/>
+              <a:buChar char="•"/>
+            </a:pPr>
+            <a:r>
+              <a:rPr lang="ko-KR" altLang="en-US" sz="1100" dirty="0">
+                <a:latin typeface="Malgun Gothic"/>
+                <a:cs typeface="Malgun Gothic"/>
+              </a:rPr>
+              <a:t>단점 </a:t>
+            </a:r>
+            <a:r>
+              <a:rPr lang="en-US" altLang="ko-KR" sz="1100" dirty="0">
+                <a:latin typeface="Malgun Gothic"/>
+                <a:cs typeface="Malgun Gothic"/>
+              </a:rPr>
+              <a:t>: </a:t>
+            </a:r>
+            <a:r>
+              <a:rPr lang="ko-KR" altLang="en-US" sz="1100" dirty="0">
+                <a:latin typeface="Malgun Gothic"/>
+                <a:cs typeface="Malgun Gothic"/>
+              </a:rPr>
+              <a:t>갑작스런 상황에 비현실적인 급제동</a:t>
+            </a:r>
+            <a:endParaRPr lang="en-US" altLang="ko-KR" sz="1100" dirty="0">
+              <a:latin typeface="Malgun Gothic"/>
+              <a:cs typeface="Malgun Gothic"/>
+            </a:endParaRPr>
+          </a:p>
+          <a:p>
+            <a:pPr marL="742950" lvl="1" indent="-285750">
+              <a:lnSpc>
+                <a:spcPct val="150000"/>
+              </a:lnSpc>
+              <a:buFont typeface="Arial" panose="020B0604020202020204" pitchFamily="34" charset="0"/>
+              <a:buChar char="•"/>
+            </a:pPr>
+            <a:r>
+              <a:rPr lang="en-US" altLang="ko-KR" sz="1200" dirty="0">
+                <a:latin typeface="Malgun Gothic"/>
+                <a:cs typeface="Malgun Gothic"/>
+              </a:rPr>
+              <a:t>Wiedemann : </a:t>
+            </a:r>
+            <a:r>
+              <a:rPr lang="ko-KR" altLang="en-US" sz="1200" dirty="0">
+                <a:latin typeface="Malgun Gothic"/>
+                <a:cs typeface="Malgun Gothic"/>
+              </a:rPr>
+              <a:t>임계치에 따라 주행모드 변경 </a:t>
+            </a:r>
+            <a:r>
+              <a:rPr lang="en-US" altLang="ko-KR" sz="1200" dirty="0">
+                <a:latin typeface="Malgun Gothic"/>
+                <a:cs typeface="Malgun Gothic"/>
+              </a:rPr>
+              <a:t>(</a:t>
+            </a:r>
+            <a:r>
+              <a:rPr lang="ko-KR" altLang="en-US" sz="1200" dirty="0">
+                <a:latin typeface="Malgun Gothic"/>
+                <a:cs typeface="Malgun Gothic"/>
+              </a:rPr>
+              <a:t>가속</a:t>
+            </a:r>
+            <a:r>
+              <a:rPr lang="en-US" altLang="ko-KR" sz="1200" dirty="0">
+                <a:latin typeface="Malgun Gothic"/>
+                <a:cs typeface="Malgun Gothic"/>
+              </a:rPr>
+              <a:t>, </a:t>
+            </a:r>
+            <a:r>
+              <a:rPr lang="ko-KR" altLang="en-US" sz="1200" dirty="0">
+                <a:latin typeface="Malgun Gothic"/>
+                <a:cs typeface="Malgun Gothic"/>
+              </a:rPr>
+              <a:t>감속</a:t>
+            </a:r>
+            <a:r>
+              <a:rPr lang="en-US" altLang="ko-KR" sz="1200" dirty="0">
+                <a:latin typeface="Malgun Gothic"/>
+                <a:cs typeface="Malgun Gothic"/>
+              </a:rPr>
+              <a:t>, </a:t>
+            </a:r>
+            <a:r>
+              <a:rPr lang="ko-KR" altLang="en-US" sz="1200" dirty="0">
+                <a:latin typeface="Malgun Gothic"/>
+                <a:cs typeface="Malgun Gothic"/>
+              </a:rPr>
+              <a:t>주행</a:t>
+            </a:r>
+            <a:r>
+              <a:rPr lang="en-US" altLang="ko-KR" sz="1200" dirty="0">
+                <a:latin typeface="Malgun Gothic"/>
+                <a:cs typeface="Malgun Gothic"/>
+              </a:rPr>
+              <a:t>)</a:t>
+            </a:r>
+          </a:p>
+          <a:p>
+            <a:pPr marL="1200150" lvl="2" indent="-285750">
+              <a:lnSpc>
+                <a:spcPct val="150000"/>
+              </a:lnSpc>
+              <a:buFont typeface="Arial" panose="020B0604020202020204" pitchFamily="34" charset="0"/>
+              <a:buChar char="•"/>
+            </a:pPr>
+            <a:r>
+              <a:rPr lang="ko-KR" altLang="en-US" sz="1100" dirty="0">
+                <a:latin typeface="Malgun Gothic"/>
+                <a:cs typeface="Malgun Gothic"/>
+              </a:rPr>
+              <a:t>장점 </a:t>
+            </a:r>
+            <a:r>
+              <a:rPr lang="en-US" altLang="ko-KR" sz="1100" dirty="0">
+                <a:latin typeface="Malgun Gothic"/>
+                <a:cs typeface="Malgun Gothic"/>
+              </a:rPr>
+              <a:t>: </a:t>
+            </a:r>
+            <a:r>
+              <a:rPr lang="ko-KR" altLang="en-US" sz="1100" dirty="0" err="1">
+                <a:latin typeface="Malgun Gothic"/>
+                <a:cs typeface="Malgun Gothic"/>
+              </a:rPr>
+              <a:t>정체시</a:t>
+            </a:r>
+            <a:r>
+              <a:rPr lang="ko-KR" altLang="en-US" sz="1100" dirty="0">
+                <a:latin typeface="Malgun Gothic"/>
+                <a:cs typeface="Malgun Gothic"/>
+              </a:rPr>
+              <a:t> 사람과 높은 정합도</a:t>
+            </a:r>
+            <a:r>
+              <a:rPr lang="en-US" altLang="ko-KR" sz="1100" dirty="0">
+                <a:latin typeface="Malgun Gothic"/>
+                <a:cs typeface="Malgun Gothic"/>
+              </a:rPr>
+              <a:t>, </a:t>
+            </a:r>
+            <a:r>
+              <a:rPr lang="ko-KR" altLang="en-US" sz="1100" dirty="0">
+                <a:latin typeface="Malgun Gothic"/>
+                <a:cs typeface="Malgun Gothic"/>
+              </a:rPr>
+              <a:t>정체 전파 구현</a:t>
+            </a:r>
+            <a:endParaRPr lang="en-US" altLang="ko-KR" sz="1100" dirty="0">
+              <a:latin typeface="Malgun Gothic"/>
+              <a:cs typeface="Malgun Gothic"/>
+            </a:endParaRPr>
+          </a:p>
+          <a:p>
+            <a:pPr marL="1200150" lvl="2" indent="-285750">
+              <a:lnSpc>
+                <a:spcPct val="150000"/>
+              </a:lnSpc>
+              <a:buFont typeface="Arial" panose="020B0604020202020204" pitchFamily="34" charset="0"/>
+              <a:buChar char="•"/>
+            </a:pPr>
+            <a:r>
+              <a:rPr lang="ko-KR" altLang="en-US" sz="1100" dirty="0">
+                <a:latin typeface="Malgun Gothic"/>
+                <a:cs typeface="Malgun Gothic"/>
+              </a:rPr>
+              <a:t>단점 </a:t>
+            </a:r>
+            <a:r>
+              <a:rPr lang="en-US" altLang="ko-KR" sz="1100" dirty="0">
+                <a:latin typeface="Malgun Gothic"/>
+                <a:cs typeface="Malgun Gothic"/>
+              </a:rPr>
+              <a:t>: </a:t>
+            </a:r>
+            <a:r>
+              <a:rPr lang="ko-KR" altLang="en-US" sz="1100" dirty="0">
+                <a:latin typeface="Malgun Gothic"/>
+                <a:cs typeface="Malgun Gothic"/>
+              </a:rPr>
+              <a:t>무거운 연산</a:t>
+            </a:r>
+            <a:endParaRPr lang="en-US" altLang="ko-KR" sz="1200" dirty="0">
+              <a:latin typeface="+mn-ea"/>
+              <a:cs typeface="Malgun Gothic"/>
+            </a:endParaRPr>
+          </a:p>
+          <a:p>
+            <a:pPr marL="285750" indent="-285750">
+              <a:lnSpc>
+                <a:spcPct val="200000"/>
+              </a:lnSpc>
+              <a:buFont typeface="Arial" panose="020B0604020202020204" pitchFamily="34" charset="0"/>
+              <a:buChar char="•"/>
+            </a:pPr>
+            <a:r>
+              <a:rPr lang="ko-KR" altLang="en-US" sz="1600" dirty="0">
                 <a:latin typeface="+mn-ea"/>
               </a:rPr>
-              <a:t>Sdsds</a:t>
-            </a:r>
+              <a:t>차선 변경</a:t>
+            </a:r>
+            <a:endParaRPr lang="en-US" altLang="ko-KR" sz="1600" dirty="0">
+              <a:latin typeface="+mn-ea"/>
+            </a:endParaRPr>
+          </a:p>
+          <a:p>
+            <a:pPr marL="742950" lvl="1" indent="-285750">
+              <a:lnSpc>
+                <a:spcPct val="150000"/>
+              </a:lnSpc>
+              <a:buFont typeface="Arial" panose="020B0604020202020204" pitchFamily="34" charset="0"/>
+              <a:buChar char="•"/>
+            </a:pPr>
+            <a:r>
+              <a:rPr lang="en-US" altLang="ko-KR" sz="1200" b="1" dirty="0">
+                <a:highlight>
+                  <a:srgbClr val="F8D4CC"/>
+                </a:highlight>
+                <a:latin typeface="Malgun Gothic"/>
+                <a:cs typeface="Malgun Gothic"/>
+              </a:rPr>
+              <a:t>MOBIL :</a:t>
+            </a:r>
+            <a:r>
+              <a:rPr lang="ko-KR" altLang="en-US" sz="1200" b="1" dirty="0">
+                <a:highlight>
+                  <a:srgbClr val="F8D4CC"/>
+                </a:highlight>
+                <a:latin typeface="Malgun Gothic"/>
+                <a:cs typeface="Malgun Gothic"/>
+              </a:rPr>
+              <a:t> </a:t>
+            </a:r>
+            <a:r>
+              <a:rPr lang="ko-KR" altLang="ko-KR" sz="1200" b="1" dirty="0">
+                <a:highlight>
+                  <a:srgbClr val="F8D4CC"/>
+                </a:highlight>
+              </a:rPr>
+              <a:t>차선 변경 전후 차량들의 감속 </a:t>
+            </a:r>
+            <a:r>
+              <a:rPr lang="ko-KR" altLang="ko-KR" sz="1200" b="1" dirty="0" err="1">
+                <a:highlight>
+                  <a:srgbClr val="F8D4CC"/>
+                </a:highlight>
+              </a:rPr>
+              <a:t>유발량</a:t>
+            </a:r>
+            <a:r>
+              <a:rPr lang="ko-KR" altLang="en-US" sz="1200" b="1" dirty="0" err="1">
+                <a:highlight>
+                  <a:srgbClr val="F8D4CC"/>
+                </a:highlight>
+              </a:rPr>
+              <a:t>을</a:t>
+            </a:r>
+            <a:r>
+              <a:rPr lang="ko-KR" altLang="en-US" sz="1200" b="1" dirty="0">
+                <a:highlight>
+                  <a:srgbClr val="F8D4CC"/>
+                </a:highlight>
+              </a:rPr>
+              <a:t> 최소화</a:t>
+            </a:r>
+            <a:r>
+              <a:rPr lang="ko-KR" altLang="ko-KR" sz="1200" b="1" dirty="0">
+                <a:highlight>
+                  <a:srgbClr val="F8D4CC"/>
+                </a:highlight>
+              </a:rPr>
+              <a:t>하고, </a:t>
+            </a:r>
+            <a:r>
+              <a:rPr lang="ko-KR" altLang="ko-KR" sz="1200" b="1" dirty="0" err="1">
+                <a:highlight>
+                  <a:srgbClr val="F8D4CC"/>
+                </a:highlight>
+              </a:rPr>
+              <a:t>이타성</a:t>
+            </a:r>
+            <a:r>
+              <a:rPr lang="ko-KR" altLang="ko-KR" sz="1200" b="1" dirty="0">
+                <a:highlight>
+                  <a:srgbClr val="F8D4CC"/>
+                </a:highlight>
+              </a:rPr>
+              <a:t> 계수를 적용해 변경 여부를 결정</a:t>
+            </a:r>
+            <a:endParaRPr lang="en-US" altLang="ko-KR" sz="1200" b="1" dirty="0">
+              <a:highlight>
+                <a:srgbClr val="F8D4CC"/>
+              </a:highlight>
+              <a:latin typeface="Malgun Gothic"/>
+              <a:cs typeface="Malgun Gothic"/>
+            </a:endParaRPr>
+          </a:p>
+          <a:p>
+            <a:pPr marL="1200150" lvl="2" indent="-285750">
+              <a:lnSpc>
+                <a:spcPct val="150000"/>
+              </a:lnSpc>
+              <a:buFont typeface="Arial" panose="020B0604020202020204" pitchFamily="34" charset="0"/>
+              <a:buChar char="•"/>
+            </a:pPr>
+            <a:r>
+              <a:rPr lang="ko-KR" altLang="en-US" sz="1100" dirty="0">
+                <a:latin typeface="Malgun Gothic"/>
+                <a:cs typeface="Malgun Gothic"/>
+              </a:rPr>
+              <a:t>장점 </a:t>
+            </a:r>
+            <a:r>
+              <a:rPr lang="en-US" altLang="ko-KR" sz="1100" dirty="0">
+                <a:latin typeface="Malgun Gothic"/>
+                <a:cs typeface="Malgun Gothic"/>
+              </a:rPr>
+              <a:t>: </a:t>
+            </a:r>
+            <a:r>
+              <a:rPr lang="ko-KR" altLang="ko-KR" sz="1100" dirty="0" err="1"/>
+              <a:t>IDM의</a:t>
+            </a:r>
+            <a:r>
+              <a:rPr lang="ko-KR" altLang="ko-KR" sz="1100" dirty="0"/>
+              <a:t> 가속도 공식을 재활용하므로 </a:t>
+            </a:r>
+            <a:r>
+              <a:rPr lang="ko-KR" altLang="en-US" sz="1100" dirty="0"/>
+              <a:t>구현이 간단하고 </a:t>
+            </a:r>
+            <a:r>
+              <a:rPr lang="ko-KR" altLang="ko-KR" sz="1100" dirty="0"/>
+              <a:t>연산 부하가 적음</a:t>
+            </a:r>
+            <a:r>
+              <a:rPr lang="en-US" altLang="ko-KR" sz="1100" dirty="0"/>
+              <a:t>,</a:t>
+            </a:r>
+            <a:r>
+              <a:rPr lang="en-US" altLang="ko-KR" sz="1100" dirty="0">
+                <a:latin typeface="Malgun Gothic"/>
+                <a:cs typeface="Malgun Gothic"/>
+              </a:rPr>
+              <a:t> </a:t>
+            </a:r>
+            <a:r>
+              <a:rPr lang="ko-KR" altLang="en-US" sz="1100" dirty="0">
+                <a:latin typeface="Malgun Gothic"/>
+                <a:cs typeface="Malgun Gothic"/>
+              </a:rPr>
+              <a:t>파라미터 유연성</a:t>
+            </a:r>
+            <a:endParaRPr lang="en-US" altLang="ko-KR" sz="1100" dirty="0">
+              <a:latin typeface="Malgun Gothic"/>
+              <a:cs typeface="Malgun Gothic"/>
+            </a:endParaRPr>
+          </a:p>
+          <a:p>
+            <a:pPr marL="1200150" lvl="2" indent="-285750">
+              <a:lnSpc>
+                <a:spcPct val="150000"/>
+              </a:lnSpc>
+              <a:buFont typeface="Arial" panose="020B0604020202020204" pitchFamily="34" charset="0"/>
+              <a:buChar char="•"/>
+            </a:pPr>
+            <a:r>
+              <a:rPr lang="ko-KR" altLang="en-US" sz="1100" dirty="0">
+                <a:latin typeface="Malgun Gothic"/>
+                <a:cs typeface="Malgun Gothic"/>
+              </a:rPr>
+              <a:t>단점 </a:t>
+            </a:r>
+            <a:r>
+              <a:rPr lang="en-US" altLang="ko-KR" sz="1100" dirty="0">
+                <a:latin typeface="Malgun Gothic"/>
+                <a:cs typeface="Malgun Gothic"/>
+              </a:rPr>
+              <a:t>: </a:t>
+            </a:r>
+            <a:r>
+              <a:rPr lang="ko-KR" altLang="en-US" sz="1100" dirty="0">
+                <a:latin typeface="Malgun Gothic"/>
+                <a:cs typeface="Malgun Gothic"/>
+              </a:rPr>
+              <a:t>차간 간격이 확보되지 않으면 끼어들지 못함</a:t>
+            </a:r>
+            <a:endParaRPr lang="en-US" altLang="ko-KR" sz="1100" dirty="0">
+              <a:latin typeface="Malgun Gothic"/>
+              <a:cs typeface="Malgun Gothic"/>
+            </a:endParaRPr>
+          </a:p>
+          <a:p>
+            <a:pPr marL="742950" lvl="1" indent="-285750">
+              <a:lnSpc>
+                <a:spcPct val="150000"/>
+              </a:lnSpc>
+              <a:buFont typeface="Arial" panose="020B0604020202020204" pitchFamily="34" charset="0"/>
+              <a:buChar char="•"/>
+            </a:pPr>
+            <a:r>
+              <a:rPr lang="en-US" altLang="ko-KR" sz="1200" dirty="0">
+                <a:latin typeface="Malgun Gothic"/>
+                <a:cs typeface="Malgun Gothic"/>
+              </a:rPr>
+              <a:t>LMRS : </a:t>
+            </a:r>
+            <a:r>
+              <a:rPr lang="ko-KR" altLang="ko-KR" sz="1200" dirty="0"/>
+              <a:t>차로 변경 욕구 수치를 산출하</a:t>
+            </a:r>
+            <a:r>
+              <a:rPr lang="ko-KR" altLang="en-US" sz="1200" dirty="0"/>
+              <a:t>여</a:t>
+            </a:r>
+            <a:r>
+              <a:rPr lang="ko-KR" altLang="ko-KR" sz="1200" dirty="0"/>
+              <a:t>, </a:t>
+            </a:r>
+            <a:r>
+              <a:rPr lang="ko-KR" altLang="en-US" sz="1200" dirty="0"/>
+              <a:t>끼어들기 </a:t>
+            </a:r>
+            <a:r>
+              <a:rPr lang="ko-KR" altLang="ko-KR" sz="1200" dirty="0"/>
+              <a:t>행동을 유도하는 모델</a:t>
+            </a:r>
+            <a:endParaRPr lang="en-US" altLang="ko-KR" sz="1200" dirty="0">
+              <a:latin typeface="Malgun Gothic"/>
+              <a:cs typeface="Malgun Gothic"/>
+            </a:endParaRPr>
+          </a:p>
+          <a:p>
+            <a:pPr marL="1200150" lvl="2" indent="-285750">
+              <a:lnSpc>
+                <a:spcPct val="150000"/>
+              </a:lnSpc>
+              <a:buFont typeface="Arial" panose="020B0604020202020204" pitchFamily="34" charset="0"/>
+              <a:buChar char="•"/>
+            </a:pPr>
+            <a:r>
+              <a:rPr lang="ko-KR" altLang="en-US" sz="1100" dirty="0">
+                <a:latin typeface="Malgun Gothic"/>
+                <a:cs typeface="Malgun Gothic"/>
+              </a:rPr>
+              <a:t>장점 </a:t>
+            </a:r>
+            <a:r>
+              <a:rPr lang="en-US" altLang="ko-KR" sz="1100" dirty="0">
+                <a:latin typeface="Malgun Gothic"/>
+                <a:cs typeface="Malgun Gothic"/>
+              </a:rPr>
+              <a:t>: </a:t>
+            </a:r>
+            <a:r>
+              <a:rPr lang="ko-KR" altLang="ko-KR" sz="1100" dirty="0"/>
+              <a:t>인간다운 </a:t>
+            </a:r>
+            <a:r>
+              <a:rPr lang="ko-KR" altLang="ko-KR" sz="1100" dirty="0" err="1"/>
+              <a:t>양보·완화</a:t>
+            </a:r>
+            <a:r>
+              <a:rPr lang="ko-KR" altLang="ko-KR" sz="1100" dirty="0"/>
+              <a:t> 메커니즘을 내장</a:t>
+            </a:r>
+            <a:r>
+              <a:rPr lang="en-US" altLang="ko-KR" sz="1100" dirty="0"/>
+              <a:t>(</a:t>
+            </a:r>
+            <a:r>
+              <a:rPr lang="ko-KR" altLang="en-US" sz="1100" dirty="0" err="1"/>
+              <a:t>깜빡이</a:t>
+            </a:r>
+            <a:r>
+              <a:rPr lang="ko-KR" altLang="en-US" sz="1100" dirty="0"/>
+              <a:t> 등 구현가능</a:t>
+            </a:r>
+            <a:r>
+              <a:rPr lang="en-US" altLang="ko-KR" sz="1100" dirty="0"/>
+              <a:t>), </a:t>
+            </a:r>
+            <a:r>
+              <a:rPr lang="ko-KR" altLang="ko-KR" sz="1100" dirty="0"/>
+              <a:t>극상의 시뮬레이션 정합성</a:t>
+            </a:r>
+            <a:endParaRPr lang="en-US" altLang="ko-KR" sz="1100" dirty="0">
+              <a:latin typeface="Malgun Gothic"/>
+              <a:cs typeface="Malgun Gothic"/>
+            </a:endParaRPr>
+          </a:p>
+          <a:p>
+            <a:pPr marL="1200150" lvl="2" indent="-285750">
+              <a:lnSpc>
+                <a:spcPct val="150000"/>
+              </a:lnSpc>
+              <a:buFont typeface="Arial" panose="020B0604020202020204" pitchFamily="34" charset="0"/>
+              <a:buChar char="•"/>
+            </a:pPr>
+            <a:r>
+              <a:rPr lang="ko-KR" altLang="en-US" sz="1100" dirty="0">
+                <a:latin typeface="Malgun Gothic"/>
+                <a:cs typeface="Malgun Gothic"/>
+              </a:rPr>
+              <a:t>단점 </a:t>
+            </a:r>
+            <a:r>
+              <a:rPr lang="en-US" altLang="ko-KR" sz="1100" dirty="0">
+                <a:latin typeface="Malgun Gothic"/>
+                <a:cs typeface="Malgun Gothic"/>
+              </a:rPr>
+              <a:t>: </a:t>
+            </a:r>
+            <a:r>
+              <a:rPr lang="ko-KR" altLang="en-US" sz="1100" dirty="0">
+                <a:latin typeface="Malgun Gothic"/>
+                <a:cs typeface="Malgun Gothic"/>
+              </a:rPr>
+              <a:t>무거운 연산 및 구현난이도</a:t>
+            </a:r>
+            <a:endParaRPr lang="en-US" altLang="ko-KR" sz="1200" dirty="0">
+              <a:latin typeface="+mn-ea"/>
+              <a:cs typeface="Malgun Gothic"/>
+            </a:endParaRPr>
+          </a:p>
+          <a:p>
+            <a:pPr marL="742950" lvl="1" indent="-285750">
+              <a:lnSpc>
+                <a:spcPct val="150000"/>
+              </a:lnSpc>
+              <a:buFont typeface="Arial" panose="020B0604020202020204" pitchFamily="34" charset="0"/>
+              <a:buChar char="•"/>
+            </a:pPr>
             <a:endParaRPr lang="en-US" altLang="ko-KR" sz="1400" dirty="0">
               <a:latin typeface="+mn-ea"/>
             </a:endParaRPr>
+          </a:p>
+        </p:txBody>
+      </p:sp>
+      <p:sp>
+        <p:nvSpPr>
+          <p:cNvPr id="3" name="TextBox 2">
+            <a:extLst>
+              <a:ext uri="{FF2B5EF4-FFF2-40B4-BE49-F238E27FC236}">
+                <a16:creationId xmlns:a16="http://schemas.microsoft.com/office/drawing/2014/main" id="{D453FE1A-AAAD-D264-1465-FDC8297C1675}"/>
+              </a:ext>
+            </a:extLst>
+          </p:cNvPr>
+          <p:cNvSpPr txBox="1"/>
+          <p:nvPr/>
+        </p:nvSpPr>
+        <p:spPr>
+          <a:xfrm>
+            <a:off x="11277600" y="6400800"/>
+            <a:ext cx="761999" cy="369332"/>
+          </a:xfrm>
+          <a:prstGeom prst="rect">
+            <a:avLst/>
+          </a:prstGeom>
+          <a:noFill/>
+        </p:spPr>
+        <p:txBody>
+          <a:bodyPr wrap="square" rtlCol="0">
+            <a:spAutoFit/>
+          </a:bodyPr>
+          <a:lstStyle/>
+          <a:p>
+            <a:r>
+              <a:rPr lang="ko-KR" altLang="en-US" dirty="0">
+                <a:hlinkClick r:id="rId3"/>
+              </a:rPr>
+              <a:t>출처</a:t>
+            </a:r>
+            <a:endParaRPr lang="ko-KR" altLang="en-US" dirty="0"/>
           </a:p>
         </p:txBody>
       </p:sp>
@@ -3911,7 +4595,7 @@
           <p:nvPr>
             <p:extLst>
               <p:ext uri="{D42A27DB-BD31-4B8C-83A1-F6EECF244321}">
-                <p14:modId xmlns:p14="http://schemas.microsoft.com/office/powerpoint/2010/main" val="154529283"/>
+                <p14:modId xmlns:p14="http://schemas.microsoft.com/office/powerpoint/2010/main" val="1775583333"/>
               </p:ext>
             </p:extLst>
           </p:nvPr>
@@ -4851,11 +5535,14 @@
                       </a:solidFill>
                       <a:prstDash val="solid"/>
                     </a:lnT>
-                    <a:lnB w="6350">
-                      <a:solidFill>
-                        <a:srgbClr val="D1D1D1"/>
-                      </a:solidFill>
-                      <a:prstDash val="solid"/>
+                    <a:lnB w="6350" cap="flat" cmpd="sng" algn="ctr">
+                      <a:solidFill>
+                        <a:srgbClr val="D1D1D1"/>
+                      </a:solidFill>
+                      <a:prstDash val="solid"/>
+                      <a:round/>
+                      <a:headEnd type="none" w="med" len="med"/>
+                      <a:tailEnd type="none" w="med" len="med"/>
                     </a:lnB>
                     <a:solidFill>
                       <a:schemeClr val="bg1">
@@ -5106,18 +5793,28 @@
                     <a:bodyPr/>
                     <a:lstStyle/>
                     <a:p>
-                      <a:pPr>
+                      <a:pPr algn="ctr">
                         <a:lnSpc>
                           <a:spcPct val="100000"/>
                         </a:lnSpc>
+                        <a:spcBef>
+                          <a:spcPts val="720"/>
+                        </a:spcBef>
                       </a:pPr>
-                      <a:endParaRPr sz="1300" dirty="0">
-                        <a:latin typeface="Times New Roman"/>
-                        <a:cs typeface="Times New Roman"/>
+                      <a:r>
+                        <a:rPr lang="en-US" sz="1200" b="1" spc="-20" dirty="0">
+                          <a:latin typeface="Malgun Gothic"/>
+                          <a:cs typeface="Malgun Gothic"/>
+                        </a:rPr>
+                        <a:t>IDM, MOBIL</a:t>
+                      </a:r>
+                      <a:endParaRPr sz="1200" dirty="0">
+                        <a:latin typeface="Malgun Gothic"/>
+                        <a:cs typeface="Malgun Gothic"/>
                       </a:endParaRPr>
                     </a:p>
                   </a:txBody>
-                  <a:tcPr marL="0" marR="0" marT="0" marB="0">
+                  <a:tcPr marL="0" marR="0" marT="91440" marB="0">
                     <a:lnL w="6350" cap="flat" cmpd="sng" algn="ctr">
                       <a:solidFill>
                         <a:srgbClr val="D1D1D1"/>
@@ -5380,11 +6077,14 @@
                       </a:solidFill>
                       <a:prstDash val="solid"/>
                     </a:lnL>
-                    <a:lnR w="6350">
-                      <a:solidFill>
-                        <a:srgbClr val="D1D1D1"/>
-                      </a:solidFill>
-                      <a:prstDash val="solid"/>
+                    <a:lnR w="6350" cap="flat" cmpd="sng" algn="ctr">
+                      <a:solidFill>
+                        <a:srgbClr val="D1D1D1"/>
+                      </a:solidFill>
+                      <a:prstDash val="solid"/>
+                      <a:round/>
+                      <a:headEnd type="none" w="med" len="med"/>
+                      <a:tailEnd type="none" w="med" len="med"/>
                     </a:lnR>
                     <a:lnT w="6350">
                       <a:solidFill>
@@ -5405,18 +6105,21 @@
                     <a:bodyPr/>
                     <a:lstStyle/>
                     <a:p>
-                      <a:pPr>
+                      <a:pPr marL="635" algn="ctr">
                         <a:lnSpc>
                           <a:spcPct val="100000"/>
                         </a:lnSpc>
+                        <a:spcBef>
+                          <a:spcPts val="725"/>
+                        </a:spcBef>
                       </a:pPr>
-                      <a:endParaRPr sz="1300" dirty="0">
-                        <a:latin typeface="Times New Roman"/>
-                        <a:cs typeface="Times New Roman"/>
+                      <a:endParaRPr sz="1200" b="1" dirty="0">
+                        <a:latin typeface="Malgun Gothic"/>
+                        <a:cs typeface="Malgun Gothic"/>
                       </a:endParaRPr>
                     </a:p>
                   </a:txBody>
-                  <a:tcPr marL="0" marR="0" marT="0" marB="0">
+                  <a:tcPr marL="0" marR="0" marT="92075" marB="0">
                     <a:lnL w="6350" cap="flat" cmpd="sng" algn="ctr">
                       <a:solidFill>
                         <a:srgbClr val="D1D1D1"/>
@@ -5646,11 +6349,14 @@
                       </a:solidFill>
                       <a:prstDash val="solid"/>
                     </a:lnR>
-                    <a:lnT w="6350">
-                      <a:solidFill>
-                        <a:srgbClr val="D1D1D1"/>
-                      </a:solidFill>
-                      <a:prstDash val="solid"/>
+                    <a:lnT w="6350" cap="flat" cmpd="sng" algn="ctr">
+                      <a:solidFill>
+                        <a:srgbClr val="D1D1D1"/>
+                      </a:solidFill>
+                      <a:prstDash val="solid"/>
+                      <a:round/>
+                      <a:headEnd type="none" w="med" len="med"/>
+                      <a:tailEnd type="none" w="med" len="med"/>
                     </a:lnT>
                     <a:lnB w="6350">
                       <a:solidFill>
